--- a/assets/pptx/catalog-90.pptx
+++ b/assets/pptx/catalog-90.pptx
@@ -3295,7 +3295,7 @@
                 <a:ea typeface="Ebrima"/>
                 <a:cs typeface="Ebrima"/>
               </a:rPr>
-              <a:t>ቀጥ ብሎ ያርግ ዛሬም እንደገና (2x)</a:t>
+              <a:t>ቀጥ ብሎ ያርግ ዛሬም እንደገና 2x</a:t>
             </a:r>
           </a:p>
           <a:p>
@@ -3313,7 +3313,7 @@
                 <a:ea typeface="Ebrima"/>
                 <a:cs typeface="Ebrima"/>
               </a:rPr>
-              <a:t>እናመሰግንሀለን(6x)</a:t>
+              <a:t>እናመሰግንሀለን6x</a:t>
             </a:r>
           </a:p>
           <a:p>
@@ -3403,7 +3403,7 @@
                 <a:ea typeface="Ebrima"/>
                 <a:cs typeface="Ebrima"/>
               </a:rPr>
-              <a:t>እናመሰግንሀለን(6x)</a:t>
+              <a:t>እናመሰግንሀለን6x</a:t>
             </a:r>
           </a:p>
           <a:p>
@@ -3475,7 +3475,7 @@
                 <a:ea typeface="Ebrima"/>
                 <a:cs typeface="Ebrima"/>
               </a:rPr>
-              <a:t>እልፍ እልልታ ላንተ ይሁን ጌታ (2x)</a:t>
+              <a:t>እልፍ እልልታ ላንተ ይሁን ጌታ 2x</a:t>
             </a:r>
           </a:p>
           <a:p>
@@ -3493,7 +3493,7 @@
                 <a:ea typeface="Ebrima"/>
                 <a:cs typeface="Ebrima"/>
               </a:rPr>
-              <a:t>እናመሰግንሀለን(6x)</a:t>
+              <a:t>እናመሰግንሀለን6x</a:t>
             </a:r>
           </a:p>
           <a:p>
@@ -3583,7 +3583,7 @@
                 <a:ea typeface="Ebrima"/>
                 <a:cs typeface="Ebrima"/>
               </a:rPr>
-              <a:t>እናመሰግንሀለን(6x)</a:t>
+              <a:t>እናመሰግንሀለን6x</a:t>
             </a:r>
           </a:p>
         </p:txBody>
